--- a/scd2/python/reporting/iceberg-perf-test.pptx
+++ b/scd2/python/reporting/iceberg-perf-test.pptx
@@ -5,17 +5,18 @@
     <p:sldMasterId id="2147483648" r:id="rId4"/>
   </p:sldMasterIdLst>
   <p:notesMasterIdLst>
-    <p:notesMasterId r:id="rId13"/>
+    <p:notesMasterId r:id="rId14"/>
   </p:notesMasterIdLst>
   <p:sldIdLst>
     <p:sldId id="308" r:id="rId5"/>
     <p:sldId id="315" r:id="rId6"/>
-    <p:sldId id="309" r:id="rId7"/>
-    <p:sldId id="313" r:id="rId8"/>
-    <p:sldId id="314" r:id="rId9"/>
-    <p:sldId id="311" r:id="rId10"/>
-    <p:sldId id="312" r:id="rId11"/>
-    <p:sldId id="268" r:id="rId12"/>
+    <p:sldId id="316" r:id="rId7"/>
+    <p:sldId id="309" r:id="rId8"/>
+    <p:sldId id="313" r:id="rId9"/>
+    <p:sldId id="314" r:id="rId10"/>
+    <p:sldId id="311" r:id="rId11"/>
+    <p:sldId id="312" r:id="rId12"/>
+    <p:sldId id="268" r:id="rId13"/>
   </p:sldIdLst>
   <p:sldSz cx="12192000" cy="6858000"/>
   <p:notesSz cx="6858000" cy="9144000"/>
@@ -124,6 +125,7 @@
           <p14:sldIdLst>
             <p14:sldId id="308"/>
             <p14:sldId id="315"/>
+            <p14:sldId id="316"/>
             <p14:sldId id="309"/>
             <p14:sldId id="313"/>
             <p14:sldId id="314"/>
@@ -251,7 +253,7 @@
             <a:fld id="{1DE7078C-3525-4C9B-BF62-C9FD13B9A875}" type="datetimeFigureOut">
               <a:rPr lang="en-US" smtClean="0"/>
               <a:pPr/>
-              <a:t>1/15/26</a:t>
+              <a:t>1/28/26</a:t>
             </a:fld>
             <a:endParaRPr lang="en-US" dirty="0"/>
           </a:p>
@@ -38794,8 +38796,13 @@
           <a:p>
             <a:r>
               <a:rPr lang="de-DE" dirty="0"/>
-              <a:t>Test Cases</a:t>
-            </a:r>
+              <a:t>Test Cases - </a:t>
+            </a:r>
+            <a:r>
+              <a:rPr lang="de-DE" dirty="0" err="1"/>
+              <a:t>Merge</a:t>
+            </a:r>
+            <a:endParaRPr lang="de-DE" dirty="0"/>
           </a:p>
         </p:txBody>
       </p:sp>
@@ -38891,6 +38898,124 @@
       </p:grpSpPr>
       <p:sp>
         <p:nvSpPr>
+          <p:cNvPr id="2" name="Title 1">
+            <a:extLst>
+              <a:ext uri="{FF2B5EF4-FFF2-40B4-BE49-F238E27FC236}">
+                <a16:creationId xmlns:a16="http://schemas.microsoft.com/office/drawing/2014/main" id="{74ED731D-4F92-79AC-0A9C-4846A66C912E}"/>
+              </a:ext>
+            </a:extLst>
+          </p:cNvPr>
+          <p:cNvSpPr>
+            <a:spLocks noGrp="1"/>
+          </p:cNvSpPr>
+          <p:nvPr>
+            <p:ph type="title"/>
+          </p:nvPr>
+        </p:nvSpPr>
+        <p:spPr/>
+        <p:txBody>
+          <a:bodyPr/>
+          <a:lstStyle/>
+          <a:p>
+            <a:r>
+              <a:rPr lang="de-DE" dirty="0"/>
+              <a:t>Test Cases - SELECT</a:t>
+            </a:r>
+          </a:p>
+        </p:txBody>
+      </p:sp>
+      <p:sp>
+        <p:nvSpPr>
+          <p:cNvPr id="4" name="Slide Number Placeholder 3">
+            <a:extLst>
+              <a:ext uri="{FF2B5EF4-FFF2-40B4-BE49-F238E27FC236}">
+                <a16:creationId xmlns:a16="http://schemas.microsoft.com/office/drawing/2014/main" id="{4A7DD3D3-1F67-9C32-97AE-1D47D0D3534E}"/>
+              </a:ext>
+            </a:extLst>
+          </p:cNvPr>
+          <p:cNvSpPr>
+            <a:spLocks noGrp="1"/>
+          </p:cNvSpPr>
+          <p:nvPr>
+            <p:ph type="sldNum" sz="quarter" idx="12"/>
+          </p:nvPr>
+        </p:nvSpPr>
+        <p:spPr/>
+        <p:txBody>
+          <a:bodyPr/>
+          <a:lstStyle/>
+          <a:p>
+            <a:fld id="{1F90F471-3972-4120-B8B3-0237DE626C35}" type="slidenum">
+              <a:rPr lang="en-US" smtClean="0"/>
+              <a:pPr/>
+              <a:t>3</a:t>
+            </a:fld>
+            <a:endParaRPr lang="en-US" dirty="0"/>
+          </a:p>
+        </p:txBody>
+      </p:sp>
+      <p:pic>
+        <p:nvPicPr>
+          <p:cNvPr id="5" name="Picture 4">
+            <a:extLst>
+              <a:ext uri="{FF2B5EF4-FFF2-40B4-BE49-F238E27FC236}">
+                <a16:creationId xmlns:a16="http://schemas.microsoft.com/office/drawing/2014/main" id="{92A97C8E-E0DA-E3C8-030D-91580573E5FC}"/>
+              </a:ext>
+            </a:extLst>
+          </p:cNvPr>
+          <p:cNvPicPr>
+            <a:picLocks noChangeAspect="1"/>
+          </p:cNvPicPr>
+          <p:nvPr/>
+        </p:nvPicPr>
+        <p:blipFill>
+          <a:blip r:embed="rId2"/>
+          <a:stretch>
+            <a:fillRect/>
+          </a:stretch>
+        </p:blipFill>
+        <p:spPr>
+          <a:xfrm>
+            <a:off x="244832" y="1371600"/>
+            <a:ext cx="11403041" cy="4175760"/>
+          </a:xfrm>
+          <a:prstGeom prst="rect">
+            <a:avLst/>
+          </a:prstGeom>
+        </p:spPr>
+      </p:pic>
+    </p:spTree>
+    <p:extLst>
+      <p:ext uri="{BB962C8B-B14F-4D97-AF65-F5344CB8AC3E}">
+        <p14:creationId xmlns:p14="http://schemas.microsoft.com/office/powerpoint/2010/main" val="1520837689"/>
+      </p:ext>
+    </p:extLst>
+  </p:cSld>
+  <p:clrMapOvr>
+    <a:masterClrMapping/>
+  </p:clrMapOvr>
+</p:sld>
+</file>
+
+<file path=ppt/slides/slide4.xml><?xml version="1.0" encoding="utf-8"?>
+<p:sld xmlns:a="http://schemas.openxmlformats.org/drawingml/2006/main" xmlns:r="http://schemas.openxmlformats.org/officeDocument/2006/relationships" xmlns:p="http://schemas.openxmlformats.org/presentationml/2006/main">
+  <p:cSld>
+    <p:spTree>
+      <p:nvGrpSpPr>
+        <p:cNvPr id="1" name=""/>
+        <p:cNvGrpSpPr/>
+        <p:nvPr/>
+      </p:nvGrpSpPr>
+      <p:grpSpPr>
+        <a:xfrm>
+          <a:off x="0" y="0"/>
+          <a:ext cx="0" cy="0"/>
+          <a:chOff x="0" y="0"/>
+          <a:chExt cx="0" cy="0"/>
+        </a:xfrm>
+      </p:grpSpPr>
+      <p:sp>
+        <p:nvSpPr>
           <p:cNvPr id="5" name="Title 4">
             <a:extLst>
               <a:ext uri="{FF2B5EF4-FFF2-40B4-BE49-F238E27FC236}">
@@ -38995,7 +39120,7 @@
 </p:sld>
 </file>
 
-<file path=ppt/slides/slide4.xml><?xml version="1.0" encoding="utf-8"?>
+<file path=ppt/slides/slide5.xml><?xml version="1.0" encoding="utf-8"?>
 <p:sld xmlns:a="http://schemas.openxmlformats.org/drawingml/2006/main" xmlns:r="http://schemas.openxmlformats.org/officeDocument/2006/relationships" xmlns:p="http://schemas.openxmlformats.org/presentationml/2006/main">
   <p:cSld>
     <p:spTree>
@@ -39064,7 +39189,7 @@
             <a:fld id="{1F90F471-3972-4120-B8B3-0237DE626C35}" type="slidenum">
               <a:rPr lang="en-US" smtClean="0"/>
               <a:pPr/>
-              <a:t>4</a:t>
+              <a:t>5</a:t>
             </a:fld>
             <a:endParaRPr lang="en-US" dirty="0"/>
           </a:p>
@@ -39148,7 +39273,7 @@
 </p:sld>
 </file>
 
-<file path=ppt/slides/slide5.xml><?xml version="1.0" encoding="utf-8"?>
+<file path=ppt/slides/slide6.xml><?xml version="1.0" encoding="utf-8"?>
 <p:sld xmlns:a="http://schemas.openxmlformats.org/drawingml/2006/main" xmlns:r="http://schemas.openxmlformats.org/officeDocument/2006/relationships" xmlns:p="http://schemas.openxmlformats.org/presentationml/2006/main">
   <p:cSld>
     <p:spTree>
@@ -39242,7 +39367,7 @@
             <a:fld id="{1F90F471-3972-4120-B8B3-0237DE626C35}" type="slidenum">
               <a:rPr lang="en-US" smtClean="0"/>
               <a:pPr/>
-              <a:t>5</a:t>
+              <a:t>6</a:t>
             </a:fld>
             <a:endParaRPr lang="en-US" dirty="0"/>
           </a:p>
@@ -39291,7 +39416,7 @@
 </p:sld>
 </file>
 
-<file path=ppt/slides/slide6.xml><?xml version="1.0" encoding="utf-8"?>
+<file path=ppt/slides/slide7.xml><?xml version="1.0" encoding="utf-8"?>
 <p:sld xmlns:a="http://schemas.openxmlformats.org/drawingml/2006/main" xmlns:r="http://schemas.openxmlformats.org/officeDocument/2006/relationships" xmlns:p="http://schemas.openxmlformats.org/presentationml/2006/main">
   <p:cSld>
     <p:spTree>
@@ -39478,7 +39603,7 @@
             <a:fld id="{1F90F471-3972-4120-B8B3-0237DE626C35}" type="slidenum">
               <a:rPr lang="en-US" smtClean="0"/>
               <a:pPr/>
-              <a:t>6</a:t>
+              <a:t>7</a:t>
             </a:fld>
             <a:endParaRPr lang="en-US" dirty="0"/>
           </a:p>
@@ -39497,7 +39622,7 @@
 </p:sld>
 </file>
 
-<file path=ppt/slides/slide7.xml><?xml version="1.0" encoding="utf-8"?>
+<file path=ppt/slides/slide8.xml><?xml version="1.0" encoding="utf-8"?>
 <p:sld xmlns:a="http://schemas.openxmlformats.org/drawingml/2006/main" xmlns:r="http://schemas.openxmlformats.org/officeDocument/2006/relationships" xmlns:p="http://schemas.openxmlformats.org/presentationml/2006/main">
   <p:cSld>
     <p:spTree>
@@ -40227,7 +40352,7 @@
             <a:fld id="{1F90F471-3972-4120-B8B3-0237DE626C35}" type="slidenum">
               <a:rPr lang="en-US" smtClean="0"/>
               <a:pPr/>
-              <a:t>7</a:t>
+              <a:t>8</a:t>
             </a:fld>
             <a:endParaRPr lang="en-US" dirty="0"/>
           </a:p>
@@ -40246,7 +40371,7 @@
 </p:sld>
 </file>
 
-<file path=ppt/slides/slide8.xml><?xml version="1.0" encoding="utf-8"?>
+<file path=ppt/slides/slide9.xml><?xml version="1.0" encoding="utf-8"?>
 <p:sld xmlns:a="http://schemas.openxmlformats.org/drawingml/2006/main" xmlns:r="http://schemas.openxmlformats.org/officeDocument/2006/relationships" xmlns:p="http://schemas.openxmlformats.org/presentationml/2006/main">
   <p:cSld>
     <p:spTree>
@@ -40843,18 +40968,18 @@
 </file>
 
 <file path=customXml/item1.xml><?xml version="1.0" encoding="utf-8"?>
-<p:properties xmlns:p="http://schemas.microsoft.com/office/2006/metadata/properties" xmlns:xsi="http://www.w3.org/2001/XMLSchema-instance" xmlns:pc="http://schemas.microsoft.com/office/infopath/2007/PartnerControls">
-  <documentManagement/>
-</p:properties>
-</file>
-
-<file path=customXml/item2.xml><?xml version="1.0" encoding="utf-8"?>
 <?mso-contentType ?>
 <FormTemplates xmlns="http://schemas.microsoft.com/sharepoint/v3/contenttype/forms">
   <Display>DocumentLibraryForm</Display>
   <Edit>DocumentLibraryForm</Edit>
   <New>DocumentLibraryForm</New>
 </FormTemplates>
+</file>
+
+<file path=customXml/item2.xml><?xml version="1.0" encoding="utf-8"?>
+<p:properties xmlns:p="http://schemas.microsoft.com/office/2006/metadata/properties" xmlns:xsi="http://www.w3.org/2001/XMLSchema-instance" xmlns:pc="http://schemas.microsoft.com/office/infopath/2007/PartnerControls">
+  <documentManagement/>
+</p:properties>
 </file>
 
 <file path=customXml/item3.xml><?xml version="1.0" encoding="utf-8"?>
@@ -40990,6 +41115,14 @@
 </file>
 
 <file path=customXml/itemProps1.xml><?xml version="1.0" encoding="utf-8"?>
+<ds:datastoreItem xmlns:ds="http://schemas.openxmlformats.org/officeDocument/2006/customXml" ds:itemID="{79831B46-6CD1-40D2-9FB5-3E58559F90A3}">
+  <ds:schemaRefs>
+    <ds:schemaRef ds:uri="http://schemas.microsoft.com/sharepoint/v3/contenttype/forms"/>
+  </ds:schemaRefs>
+</ds:datastoreItem>
+</file>
+
+<file path=customXml/itemProps2.xml><?xml version="1.0" encoding="utf-8"?>
 <ds:datastoreItem xmlns:ds="http://schemas.openxmlformats.org/officeDocument/2006/customXml" ds:itemID="{46BFFC05-B2F6-4CED-BE65-F75B1EB7AD7B}">
   <ds:schemaRefs>
     <ds:schemaRef ds:uri="http://purl.org/dc/dcmitype/"/>
@@ -41002,14 +41135,6 @@
     <ds:schemaRef ds:uri="http://schemas.microsoft.com/office/infopath/2007/PartnerControls"/>
     <ds:schemaRef ds:uri="17c09f85-56e7-4417-b5d2-7fa4154de313"/>
     <ds:schemaRef ds:uri="http://www.w3.org/XML/1998/namespace"/>
-  </ds:schemaRefs>
-</ds:datastoreItem>
-</file>
-
-<file path=customXml/itemProps2.xml><?xml version="1.0" encoding="utf-8"?>
-<ds:datastoreItem xmlns:ds="http://schemas.openxmlformats.org/officeDocument/2006/customXml" ds:itemID="{79831B46-6CD1-40D2-9FB5-3E58559F90A3}">
-  <ds:schemaRefs>
-    <ds:schemaRef ds:uri="http://schemas.microsoft.com/sharepoint/v3/contenttype/forms"/>
   </ds:schemaRefs>
 </ds:datastoreItem>
 </file>
